--- a/exp/kuramoto/kuramoto_tuning_report.pptx
+++ b/exp/kuramoto/kuramoto_tuning_report.pptx
@@ -3911,24 +3911,6 @@
       </p:sp>
       <p:sp>
         <p:nvSpPr>
-          <p:cNvPr id="3" name="文本占位符 2"/>
-          <p:cNvSpPr>
-            <a:spLocks noGrp="1"/>
-          </p:cNvSpPr>
-          <p:nvPr>
-            <p:ph type="body" idx="1"/>
-          </p:nvPr>
-        </p:nvSpPr>
-        <p:spPr/>
-        <p:txBody>
-          <a:bodyPr/>
-          <a:p>
-            <a:endParaRPr lang="zh-CN" altLang="en-US"/>
-          </a:p>
-        </p:txBody>
-      </p:sp>
-      <p:sp>
-        <p:nvSpPr>
           <p:cNvPr id="4" name="文本框 3"/>
           <p:cNvSpPr txBox="1"/>
           <p:nvPr/>
@@ -4201,24 +4183,6 @@
       </p:sp>
       <p:sp>
         <p:nvSpPr>
-          <p:cNvPr id="3" name="文本占位符 2"/>
-          <p:cNvSpPr>
-            <a:spLocks noGrp="1"/>
-          </p:cNvSpPr>
-          <p:nvPr>
-            <p:ph type="body" idx="1"/>
-          </p:nvPr>
-        </p:nvSpPr>
-        <p:spPr/>
-        <p:txBody>
-          <a:bodyPr/>
-          <a:p>
-            <a:endParaRPr lang="zh-CN" altLang="en-US"/>
-          </a:p>
-        </p:txBody>
-      </p:sp>
-      <p:sp>
-        <p:nvSpPr>
           <p:cNvPr id="4" name="文本框 3"/>
           <p:cNvSpPr txBox="1"/>
           <p:nvPr/>
@@ -4415,24 +4379,6 @@
       </p:sp>
       <p:sp>
         <p:nvSpPr>
-          <p:cNvPr id="3" name="文本占位符 2"/>
-          <p:cNvSpPr>
-            <a:spLocks noGrp="1"/>
-          </p:cNvSpPr>
-          <p:nvPr>
-            <p:ph type="body" idx="1"/>
-          </p:nvPr>
-        </p:nvSpPr>
-        <p:spPr/>
-        <p:txBody>
-          <a:bodyPr/>
-          <a:p>
-            <a:endParaRPr lang="zh-CN" altLang="en-US"/>
-          </a:p>
-        </p:txBody>
-      </p:sp>
-      <p:sp>
-        <p:nvSpPr>
           <p:cNvPr id="4" name="文本框 3"/>
           <p:cNvSpPr txBox="1"/>
           <p:nvPr/>
@@ -4590,24 +4536,6 @@
           </a:p>
         </p:txBody>
       </p:sp>
-      <p:sp>
-        <p:nvSpPr>
-          <p:cNvPr id="3" name="文本占位符 2"/>
-          <p:cNvSpPr>
-            <a:spLocks noGrp="1"/>
-          </p:cNvSpPr>
-          <p:nvPr>
-            <p:ph type="body" idx="1"/>
-          </p:nvPr>
-        </p:nvSpPr>
-        <p:spPr/>
-        <p:txBody>
-          <a:bodyPr/>
-          <a:p>
-            <a:endParaRPr lang="zh-CN" altLang="en-US"/>
-          </a:p>
-        </p:txBody>
-      </p:sp>
       <p:pic>
         <p:nvPicPr>
           <p:cNvPr id="4" name="图片 3" descr="kuramoto_sweep_heatmap"/>
@@ -4624,8 +4552,8 @@
         </p:blipFill>
         <p:spPr>
           <a:xfrm>
-            <a:off x="508000" y="1270000"/>
-            <a:ext cx="5334000" cy="3810000"/>
+            <a:off x="334010" y="1268095"/>
+            <a:ext cx="3914775" cy="2796540"/>
           </a:xfrm>
           <a:prstGeom prst="rect">
             <a:avLst/>
@@ -4648,8 +4576,8 @@
         </p:blipFill>
         <p:spPr>
           <a:xfrm>
-            <a:off x="6223000" y="1270000"/>
-            <a:ext cx="5334000" cy="3810000"/>
+            <a:off x="4390390" y="1357630"/>
+            <a:ext cx="3789680" cy="2707005"/>
           </a:xfrm>
           <a:prstGeom prst="rect">
             <a:avLst/>
@@ -4704,32 +4632,14 @@
       </p:sp>
       <p:sp>
         <p:nvSpPr>
-          <p:cNvPr id="3" name="文本占位符 2"/>
-          <p:cNvSpPr>
-            <a:spLocks noGrp="1"/>
-          </p:cNvSpPr>
-          <p:nvPr>
-            <p:ph type="body" idx="1"/>
-          </p:nvPr>
-        </p:nvSpPr>
-        <p:spPr/>
-        <p:txBody>
-          <a:bodyPr/>
-          <a:p>
-            <a:endParaRPr lang="zh-CN" altLang="en-US"/>
-          </a:p>
-        </p:txBody>
-      </p:sp>
-      <p:sp>
-        <p:nvSpPr>
           <p:cNvPr id="4" name="文本框 3"/>
           <p:cNvSpPr txBox="1"/>
           <p:nvPr/>
         </p:nvSpPr>
         <p:spPr>
           <a:xfrm>
-            <a:off x="508000" y="1143000"/>
-            <a:ext cx="10922000" cy="1014730"/>
+            <a:off x="219075" y="1268095"/>
+            <a:ext cx="8696325" cy="1858010"/>
           </a:xfrm>
           <a:prstGeom prst="rect">
             <a:avLst/>
@@ -4738,7 +4648,7 @@
         </p:spPr>
         <p:txBody>
           <a:bodyPr wrap="square" rtlCol="0" anchor="t">
-            <a:spAutoFit/>
+            <a:noAutofit/>
           </a:bodyPr>
           <a:p>
             <a:r>
